--- a/src/egu2026_optphoto_smith.pptx
+++ b/src/egu2026_optphoto_smith.pptx
@@ -7,8 +7,21 @@
   <p:sldIdLst>
     <p:sldId id="256" r:id="rId2"/>
     <p:sldId id="306" r:id="rId3"/>
-    <p:sldId id="257" r:id="rId4"/>
-    <p:sldId id="305" r:id="rId5"/>
+    <p:sldId id="307" r:id="rId4"/>
+    <p:sldId id="311" r:id="rId5"/>
+    <p:sldId id="312" r:id="rId6"/>
+    <p:sldId id="486" r:id="rId7"/>
+    <p:sldId id="420" r:id="rId8"/>
+    <p:sldId id="421" r:id="rId9"/>
+    <p:sldId id="424" r:id="rId10"/>
+    <p:sldId id="422" r:id="rId11"/>
+    <p:sldId id="291" r:id="rId12"/>
+    <p:sldId id="308" r:id="rId13"/>
+    <p:sldId id="487" r:id="rId14"/>
+    <p:sldId id="309" r:id="rId15"/>
+    <p:sldId id="310" r:id="rId16"/>
+    <p:sldId id="257" r:id="rId17"/>
+    <p:sldId id="305" r:id="rId18"/>
   </p:sldIdLst>
   <p:sldSz cx="12192000" cy="6858000"/>
   <p:notesSz cx="6858000" cy="9144000"/>
@@ -107,6 +120,11 @@
       </a:defRPr>
     </a:lvl9pPr>
   </p:defaultTextStyle>
+  <p:extLst>
+    <p:ext uri="{EFAFB233-063F-42B5-8137-9DF3F51BA10A}">
+      <p15:sldGuideLst xmlns:p15="http://schemas.microsoft.com/office/powerpoint/2012/main"/>
+    </p:ext>
+  </p:extLst>
 </p:presentation>
 </file>
 
@@ -257,7 +275,7 @@
           <a:p>
             <a:fld id="{698A1690-DE7E-224D-9F4F-B19CE0068089}" type="datetimeFigureOut">
               <a:rPr lang="en-US" smtClean="0"/>
-              <a:t>4/27/26</a:t>
+              <a:t>4/28/26</a:t>
             </a:fld>
             <a:endParaRPr lang="en-US"/>
           </a:p>
@@ -455,7 +473,7 @@
           <a:p>
             <a:fld id="{698A1690-DE7E-224D-9F4F-B19CE0068089}" type="datetimeFigureOut">
               <a:rPr lang="en-US" smtClean="0"/>
-              <a:t>4/27/26</a:t>
+              <a:t>4/28/26</a:t>
             </a:fld>
             <a:endParaRPr lang="en-US"/>
           </a:p>
@@ -663,7 +681,7 @@
           <a:p>
             <a:fld id="{698A1690-DE7E-224D-9F4F-B19CE0068089}" type="datetimeFigureOut">
               <a:rPr lang="en-US" smtClean="0"/>
-              <a:t>4/27/26</a:t>
+              <a:t>4/28/26</a:t>
             </a:fld>
             <a:endParaRPr lang="en-US"/>
           </a:p>
@@ -861,7 +879,7 @@
           <a:p>
             <a:fld id="{698A1690-DE7E-224D-9F4F-B19CE0068089}" type="datetimeFigureOut">
               <a:rPr lang="en-US" smtClean="0"/>
-              <a:t>4/27/26</a:t>
+              <a:t>4/28/26</a:t>
             </a:fld>
             <a:endParaRPr lang="en-US"/>
           </a:p>
@@ -1136,7 +1154,7 @@
           <a:p>
             <a:fld id="{698A1690-DE7E-224D-9F4F-B19CE0068089}" type="datetimeFigureOut">
               <a:rPr lang="en-US" smtClean="0"/>
-              <a:t>4/27/26</a:t>
+              <a:t>4/28/26</a:t>
             </a:fld>
             <a:endParaRPr lang="en-US"/>
           </a:p>
@@ -1401,7 +1419,7 @@
           <a:p>
             <a:fld id="{698A1690-DE7E-224D-9F4F-B19CE0068089}" type="datetimeFigureOut">
               <a:rPr lang="en-US" smtClean="0"/>
-              <a:t>4/27/26</a:t>
+              <a:t>4/28/26</a:t>
             </a:fld>
             <a:endParaRPr lang="en-US"/>
           </a:p>
@@ -1813,7 +1831,7 @@
           <a:p>
             <a:fld id="{698A1690-DE7E-224D-9F4F-B19CE0068089}" type="datetimeFigureOut">
               <a:rPr lang="en-US" smtClean="0"/>
-              <a:t>4/27/26</a:t>
+              <a:t>4/28/26</a:t>
             </a:fld>
             <a:endParaRPr lang="en-US"/>
           </a:p>
@@ -1954,7 +1972,7 @@
           <a:p>
             <a:fld id="{698A1690-DE7E-224D-9F4F-B19CE0068089}" type="datetimeFigureOut">
               <a:rPr lang="en-US" smtClean="0"/>
-              <a:t>4/27/26</a:t>
+              <a:t>4/28/26</a:t>
             </a:fld>
             <a:endParaRPr lang="en-US"/>
           </a:p>
@@ -2067,7 +2085,7 @@
           <a:p>
             <a:fld id="{698A1690-DE7E-224D-9F4F-B19CE0068089}" type="datetimeFigureOut">
               <a:rPr lang="en-US" smtClean="0"/>
-              <a:t>4/27/26</a:t>
+              <a:t>4/28/26</a:t>
             </a:fld>
             <a:endParaRPr lang="en-US"/>
           </a:p>
@@ -2378,7 +2396,7 @@
           <a:p>
             <a:fld id="{698A1690-DE7E-224D-9F4F-B19CE0068089}" type="datetimeFigureOut">
               <a:rPr lang="en-US" smtClean="0"/>
-              <a:t>4/27/26</a:t>
+              <a:t>4/28/26</a:t>
             </a:fld>
             <a:endParaRPr lang="en-US"/>
           </a:p>
@@ -2666,7 +2684,7 @@
           <a:p>
             <a:fld id="{698A1690-DE7E-224D-9F4F-B19CE0068089}" type="datetimeFigureOut">
               <a:rPr lang="en-US" smtClean="0"/>
-              <a:t>4/27/26</a:t>
+              <a:t>4/28/26</a:t>
             </a:fld>
             <a:endParaRPr lang="en-US"/>
           </a:p>
@@ -2907,7 +2925,7 @@
           <a:p>
             <a:fld id="{698A1690-DE7E-224D-9F4F-B19CE0068089}" type="datetimeFigureOut">
               <a:rPr lang="en-US" smtClean="0"/>
-              <a:t>4/27/26</a:t>
+              <a:t>4/28/26</a:t>
             </a:fld>
             <a:endParaRPr lang="en-US"/>
           </a:p>
@@ -3406,7 +3424,7 @@
 </p:sld>
 </file>
 
-<file path=ppt/slides/slide2.xml><?xml version="1.0" encoding="utf-8"?>
+<file path=ppt/slides/slide10.xml><?xml version="1.0" encoding="utf-8"?>
 <p:sld xmlns:a="http://schemas.openxmlformats.org/drawingml/2006/main" xmlns:r="http://schemas.openxmlformats.org/officeDocument/2006/relationships" xmlns:p="http://schemas.openxmlformats.org/presentationml/2006/main">
   <p:cSld>
     <p:spTree>
@@ -3425,61 +3443,107 @@
       </p:grpSpPr>
       <p:sp>
         <p:nvSpPr>
-          <p:cNvPr id="2" name="Title 1">
-            <a:extLst>
-              <a:ext uri="{FF2B5EF4-FFF2-40B4-BE49-F238E27FC236}">
-                <a16:creationId xmlns:a16="http://schemas.microsoft.com/office/drawing/2014/main" id="{6626E519-EBE0-E18E-942A-F0D040DEC1DD}"/>
-              </a:ext>
-            </a:extLst>
-          </p:cNvPr>
-          <p:cNvSpPr>
-            <a:spLocks noGrp="1"/>
-          </p:cNvSpPr>
-          <p:nvPr>
-            <p:ph type="title"/>
-          </p:nvPr>
-        </p:nvSpPr>
-        <p:spPr/>
-        <p:txBody>
-          <a:bodyPr/>
-          <a:lstStyle/>
-          <a:p>
-            <a:r>
-              <a:rPr lang="en-US"/>
-              <a:t>Outline</a:t>
-            </a:r>
-          </a:p>
-        </p:txBody>
-      </p:sp>
-      <p:sp>
-        <p:nvSpPr>
-          <p:cNvPr id="3" name="Content Placeholder 2">
-            <a:extLst>
-              <a:ext uri="{FF2B5EF4-FFF2-40B4-BE49-F238E27FC236}">
-                <a16:creationId xmlns:a16="http://schemas.microsoft.com/office/drawing/2014/main" id="{C93137A1-6F4C-603B-D5F9-02E085DCB61B}"/>
-              </a:ext>
-            </a:extLst>
-          </p:cNvPr>
-          <p:cNvSpPr>
-            <a:spLocks noGrp="1"/>
-          </p:cNvSpPr>
-          <p:nvPr>
-            <p:ph idx="1"/>
-          </p:nvPr>
-        </p:nvSpPr>
-        <p:spPr/>
-        <p:txBody>
-          <a:bodyPr/>
-          <a:lstStyle/>
-          <a:p>
-            <a:endParaRPr lang="en-US"/>
-          </a:p>
-        </p:txBody>
-      </p:sp>
+          <p:cNvPr id="4" name="TextBox 3">
+            <a:extLst>
+              <a:ext uri="{FF2B5EF4-FFF2-40B4-BE49-F238E27FC236}">
+                <a16:creationId xmlns:a16="http://schemas.microsoft.com/office/drawing/2014/main" id="{1AF285EF-B54B-EC47-979F-5BC743D49492}"/>
+              </a:ext>
+            </a:extLst>
+          </p:cNvPr>
+          <p:cNvSpPr txBox="1"/>
+          <p:nvPr/>
+        </p:nvSpPr>
+        <p:spPr>
+          <a:xfrm>
+            <a:off x="7942997" y="2129051"/>
+            <a:ext cx="3753135" cy="2862322"/>
+          </a:xfrm>
+          <a:prstGeom prst="rect">
+            <a:avLst/>
+          </a:prstGeom>
+          <a:noFill/>
+        </p:spPr>
+        <p:txBody>
+          <a:bodyPr wrap="square" rtlCol="0">
+            <a:spAutoFit/>
+          </a:bodyPr>
+          <a:lstStyle/>
+          <a:p>
+            <a:r>
+              <a:rPr lang="en-US" sz="3600" i="1" dirty="0" err="1">
+                <a:solidFill>
+                  <a:srgbClr val="011893"/>
+                </a:solidFill>
+                <a:cs typeface="Calibri" panose="020F0502020204030204" pitchFamily="34" charset="0"/>
+              </a:rPr>
+              <a:t>V</a:t>
+            </a:r>
+            <a:r>
+              <a:rPr lang="en-US" sz="3600" baseline="-25000" dirty="0" err="1">
+                <a:solidFill>
+                  <a:srgbClr val="011893"/>
+                </a:solidFill>
+                <a:cs typeface="Calibri" panose="020F0502020204030204" pitchFamily="34" charset="0"/>
+              </a:rPr>
+              <a:t>cmax</a:t>
+            </a:r>
+            <a:r>
+              <a:rPr lang="en-US" sz="3600" dirty="0">
+                <a:solidFill>
+                  <a:srgbClr val="011893"/>
+                </a:solidFill>
+                <a:cs typeface="Calibri" panose="020F0502020204030204" pitchFamily="34" charset="0"/>
+              </a:rPr>
+              <a:t> decreases with soil N limitation because Rubisco requires a lot of N</a:t>
+            </a:r>
+            <a:endParaRPr lang="en-US" sz="3600" dirty="0">
+              <a:solidFill>
+                <a:srgbClr val="011893"/>
+              </a:solidFill>
+            </a:endParaRPr>
+          </a:p>
+        </p:txBody>
+      </p:sp>
+      <p:pic>
+        <p:nvPicPr>
+          <p:cNvPr id="5" name="Picture 4">
+            <a:extLst>
+              <a:ext uri="{FF2B5EF4-FFF2-40B4-BE49-F238E27FC236}">
+                <a16:creationId xmlns:a16="http://schemas.microsoft.com/office/drawing/2014/main" id="{3343DA74-592A-834D-B8D0-3CAE888456F9}"/>
+              </a:ext>
+            </a:extLst>
+          </p:cNvPr>
+          <p:cNvPicPr>
+            <a:picLocks noChangeAspect="1"/>
+          </p:cNvPicPr>
+          <p:nvPr/>
+        </p:nvPicPr>
+        <p:blipFill>
+          <a:blip r:embed="rId2" cstate="hqprint">
+            <a:extLst>
+              <a:ext uri="{28A0092B-C50C-407E-A947-70E740481C1C}">
+                <a14:useLocalDpi xmlns:a14="http://schemas.microsoft.com/office/drawing/2010/main"/>
+              </a:ext>
+            </a:extLst>
+          </a:blip>
+          <a:stretch>
+            <a:fillRect/>
+          </a:stretch>
+        </p:blipFill>
+        <p:spPr>
+          <a:xfrm>
+            <a:off x="0" y="0"/>
+            <a:ext cx="6858000" cy="6858000"/>
+          </a:xfrm>
+          <a:prstGeom prst="rect">
+            <a:avLst/>
+          </a:prstGeom>
+        </p:spPr>
+      </p:pic>
     </p:spTree>
     <p:extLst>
       <p:ext uri="{BB962C8B-B14F-4D97-AF65-F5344CB8AC3E}">
-        <p14:creationId xmlns:p14="http://schemas.microsoft.com/office/powerpoint/2010/main" val="2340562297"/>
+        <p14:creationId xmlns:p14="http://schemas.microsoft.com/office/powerpoint/2010/main" val="1714904836"/>
       </p:ext>
     </p:extLst>
   </p:cSld>
@@ -3489,7 +3553,762 @@
 </p:sld>
 </file>
 
-<file path=ppt/slides/slide3.xml><?xml version="1.0" encoding="utf-8"?>
+<file path=ppt/slides/slide11.xml><?xml version="1.0" encoding="utf-8"?>
+<p:sld xmlns:a="http://schemas.openxmlformats.org/drawingml/2006/main" xmlns:r="http://schemas.openxmlformats.org/officeDocument/2006/relationships" xmlns:p="http://schemas.openxmlformats.org/presentationml/2006/main">
+  <p:cSld>
+    <p:spTree>
+      <p:nvGrpSpPr>
+        <p:cNvPr id="1" name=""/>
+        <p:cNvGrpSpPr/>
+        <p:nvPr/>
+      </p:nvGrpSpPr>
+      <p:grpSpPr>
+        <a:xfrm>
+          <a:off x="0" y="0"/>
+          <a:ext cx="0" cy="0"/>
+          <a:chOff x="0" y="0"/>
+          <a:chExt cx="0" cy="0"/>
+        </a:xfrm>
+      </p:grpSpPr>
+      <p:sp>
+        <p:nvSpPr>
+          <p:cNvPr id="3" name="Title 1"/>
+          <p:cNvSpPr txBox="1">
+            <a:spLocks/>
+          </p:cNvSpPr>
+          <p:nvPr/>
+        </p:nvSpPr>
+        <p:spPr>
+          <a:xfrm>
+            <a:off x="811306" y="579639"/>
+            <a:ext cx="10515600" cy="872004"/>
+          </a:xfrm>
+          <a:prstGeom prst="rect">
+            <a:avLst/>
+          </a:prstGeom>
+        </p:spPr>
+        <p:txBody>
+          <a:bodyPr/>
+          <a:lstStyle>
+            <a:lvl1pPr algn="l" defTabSz="914400" rtl="0" eaLnBrk="1" latinLnBrk="0" hangingPunct="1">
+              <a:lnSpc>
+                <a:spcPct val="90000"/>
+              </a:lnSpc>
+              <a:spcBef>
+                <a:spcPct val="0"/>
+              </a:spcBef>
+              <a:buNone/>
+              <a:defRPr sz="4400" kern="1200">
+                <a:solidFill>
+                  <a:schemeClr val="tx1"/>
+                </a:solidFill>
+                <a:latin typeface="+mj-lt"/>
+                <a:ea typeface="+mj-ea"/>
+                <a:cs typeface="+mj-cs"/>
+              </a:defRPr>
+            </a:lvl1pPr>
+          </a:lstStyle>
+          <a:p>
+            <a:r>
+              <a:rPr lang="en-US" dirty="0"/>
+              <a:t>We can predict optimal traits in different environments</a:t>
+            </a:r>
+          </a:p>
+        </p:txBody>
+      </p:sp>
+      <p:pic>
+        <p:nvPicPr>
+          <p:cNvPr id="9" name="Picture 8">
+            <a:extLst>
+              <a:ext uri="{FF2B5EF4-FFF2-40B4-BE49-F238E27FC236}">
+                <a16:creationId xmlns:a16="http://schemas.microsoft.com/office/drawing/2014/main" id="{0BFF4907-D727-8F41-B448-D51133943C03}"/>
+              </a:ext>
+            </a:extLst>
+          </p:cNvPr>
+          <p:cNvPicPr>
+            <a:picLocks noChangeAspect="1"/>
+          </p:cNvPicPr>
+          <p:nvPr/>
+        </p:nvPicPr>
+        <p:blipFill rotWithShape="1">
+          <a:blip r:embed="rId2" cstate="screen">
+            <a:extLst>
+              <a:ext uri="{28A0092B-C50C-407E-A947-70E740481C1C}">
+                <a14:useLocalDpi xmlns:a14="http://schemas.microsoft.com/office/drawing/2010/main"/>
+              </a:ext>
+            </a:extLst>
+          </a:blip>
+          <a:srcRect/>
+          <a:stretch/>
+        </p:blipFill>
+        <p:spPr>
+          <a:xfrm>
+            <a:off x="1773398" y="2129421"/>
+            <a:ext cx="8591415" cy="4218370"/>
+          </a:xfrm>
+          <a:prstGeom prst="rect">
+            <a:avLst/>
+          </a:prstGeom>
+        </p:spPr>
+      </p:pic>
+      <p:sp>
+        <p:nvSpPr>
+          <p:cNvPr id="2" name="Rectangle 1">
+            <a:extLst>
+              <a:ext uri="{FF2B5EF4-FFF2-40B4-BE49-F238E27FC236}">
+                <a16:creationId xmlns:a16="http://schemas.microsoft.com/office/drawing/2014/main" id="{3C11B8A2-771B-DE48-B3AA-074713D6ED9A}"/>
+              </a:ext>
+            </a:extLst>
+          </p:cNvPr>
+          <p:cNvSpPr/>
+          <p:nvPr/>
+        </p:nvSpPr>
+        <p:spPr>
+          <a:xfrm>
+            <a:off x="9742714" y="4724400"/>
+            <a:ext cx="97972" cy="130629"/>
+          </a:xfrm>
+          <a:prstGeom prst="rect">
+            <a:avLst/>
+          </a:prstGeom>
+          <a:solidFill>
+            <a:schemeClr val="bg1"/>
+          </a:solidFill>
+          <a:ln>
+            <a:solidFill>
+              <a:schemeClr val="bg1"/>
+            </a:solidFill>
+          </a:ln>
+        </p:spPr>
+        <p:style>
+          <a:lnRef idx="2">
+            <a:schemeClr val="accent1">
+              <a:shade val="50000"/>
+            </a:schemeClr>
+          </a:lnRef>
+          <a:fillRef idx="1">
+            <a:schemeClr val="accent1"/>
+          </a:fillRef>
+          <a:effectRef idx="0">
+            <a:schemeClr val="accent1"/>
+          </a:effectRef>
+          <a:fontRef idx="minor">
+            <a:schemeClr val="lt1"/>
+          </a:fontRef>
+        </p:style>
+        <p:txBody>
+          <a:bodyPr rtlCol="0" anchor="ctr"/>
+          <a:lstStyle/>
+          <a:p>
+            <a:pPr algn="ctr"/>
+            <a:endParaRPr lang="en-US"/>
+          </a:p>
+        </p:txBody>
+      </p:sp>
+    </p:spTree>
+    <p:extLst>
+      <p:ext uri="{BB962C8B-B14F-4D97-AF65-F5344CB8AC3E}">
+        <p14:creationId xmlns:p14="http://schemas.microsoft.com/office/powerpoint/2010/main" val="3220437236"/>
+      </p:ext>
+    </p:extLst>
+  </p:cSld>
+  <p:clrMapOvr>
+    <a:masterClrMapping/>
+  </p:clrMapOvr>
+</p:sld>
+</file>
+
+<file path=ppt/slides/slide12.xml><?xml version="1.0" encoding="utf-8"?>
+<p:sld xmlns:a="http://schemas.openxmlformats.org/drawingml/2006/main" xmlns:r="http://schemas.openxmlformats.org/officeDocument/2006/relationships" xmlns:p="http://schemas.openxmlformats.org/presentationml/2006/main">
+  <p:cSld>
+    <p:spTree>
+      <p:nvGrpSpPr>
+        <p:cNvPr id="1" name="">
+          <a:extLst>
+            <a:ext uri="{FF2B5EF4-FFF2-40B4-BE49-F238E27FC236}">
+              <a16:creationId xmlns:a16="http://schemas.microsoft.com/office/drawing/2014/main" id="{9B5C1BE3-FE34-87E6-51B3-E232866E47EF}"/>
+            </a:ext>
+          </a:extLst>
+        </p:cNvPr>
+        <p:cNvGrpSpPr/>
+        <p:nvPr/>
+      </p:nvGrpSpPr>
+      <p:grpSpPr>
+        <a:xfrm>
+          <a:off x="0" y="0"/>
+          <a:ext cx="0" cy="0"/>
+          <a:chOff x="0" y="0"/>
+          <a:chExt cx="0" cy="0"/>
+        </a:xfrm>
+      </p:grpSpPr>
+      <p:sp>
+        <p:nvSpPr>
+          <p:cNvPr id="2" name="Title 1">
+            <a:extLst>
+              <a:ext uri="{FF2B5EF4-FFF2-40B4-BE49-F238E27FC236}">
+                <a16:creationId xmlns:a16="http://schemas.microsoft.com/office/drawing/2014/main" id="{6535DF74-4255-08E0-F02B-2AF6D26D7393}"/>
+              </a:ext>
+            </a:extLst>
+          </p:cNvPr>
+          <p:cNvSpPr>
+            <a:spLocks noGrp="1"/>
+          </p:cNvSpPr>
+          <p:nvPr>
+            <p:ph type="title"/>
+          </p:nvPr>
+        </p:nvSpPr>
+        <p:spPr/>
+        <p:txBody>
+          <a:bodyPr/>
+          <a:lstStyle/>
+          <a:p>
+            <a:r>
+              <a:rPr lang="en-US"/>
+              <a:t>Outline</a:t>
+            </a:r>
+          </a:p>
+        </p:txBody>
+      </p:sp>
+      <p:sp>
+        <p:nvSpPr>
+          <p:cNvPr id="3" name="Content Placeholder 2">
+            <a:extLst>
+              <a:ext uri="{FF2B5EF4-FFF2-40B4-BE49-F238E27FC236}">
+                <a16:creationId xmlns:a16="http://schemas.microsoft.com/office/drawing/2014/main" id="{CEFF111C-DC7E-F024-8B36-4ADF8BF7E4CA}"/>
+              </a:ext>
+            </a:extLst>
+          </p:cNvPr>
+          <p:cNvSpPr>
+            <a:spLocks noGrp="1"/>
+          </p:cNvSpPr>
+          <p:nvPr>
+            <p:ph idx="1"/>
+          </p:nvPr>
+        </p:nvSpPr>
+        <p:spPr/>
+        <p:txBody>
+          <a:bodyPr>
+            <a:normAutofit/>
+          </a:bodyPr>
+          <a:lstStyle/>
+          <a:p>
+            <a:r>
+              <a:rPr lang="en-US" sz="4400" dirty="0">
+                <a:solidFill>
+                  <a:schemeClr val="bg1">
+                    <a:lumMod val="85000"/>
+                  </a:schemeClr>
+                </a:solidFill>
+              </a:rPr>
+              <a:t>Eco-evolutionary optimality theory</a:t>
+            </a:r>
+          </a:p>
+          <a:p>
+            <a:r>
+              <a:rPr lang="en-US" sz="4400" dirty="0"/>
+              <a:t>Global optimal photosynthetic traits</a:t>
+            </a:r>
+          </a:p>
+          <a:p>
+            <a:r>
+              <a:rPr lang="en-US" sz="4400" dirty="0">
+                <a:solidFill>
+                  <a:schemeClr val="bg1">
+                    <a:lumMod val="85000"/>
+                  </a:schemeClr>
+                </a:solidFill>
+              </a:rPr>
+              <a:t>Site-level trait variability</a:t>
+            </a:r>
+          </a:p>
+          <a:p>
+            <a:r>
+              <a:rPr lang="en-US" sz="4400" dirty="0">
+                <a:solidFill>
+                  <a:schemeClr val="bg1">
+                    <a:lumMod val="85000"/>
+                  </a:schemeClr>
+                </a:solidFill>
+              </a:rPr>
+              <a:t>Implications</a:t>
+            </a:r>
+          </a:p>
+        </p:txBody>
+      </p:sp>
+    </p:spTree>
+    <p:extLst>
+      <p:ext uri="{BB962C8B-B14F-4D97-AF65-F5344CB8AC3E}">
+        <p14:creationId xmlns:p14="http://schemas.microsoft.com/office/powerpoint/2010/main" val="3713124229"/>
+      </p:ext>
+    </p:extLst>
+  </p:cSld>
+  <p:clrMapOvr>
+    <a:masterClrMapping/>
+  </p:clrMapOvr>
+</p:sld>
+</file>
+
+<file path=ppt/slides/slide13.xml><?xml version="1.0" encoding="utf-8"?>
+<p:sld xmlns:a="http://schemas.openxmlformats.org/drawingml/2006/main" xmlns:r="http://schemas.openxmlformats.org/officeDocument/2006/relationships" xmlns:p="http://schemas.openxmlformats.org/presentationml/2006/main">
+  <p:cSld>
+    <p:spTree>
+      <p:nvGrpSpPr>
+        <p:cNvPr id="1" name=""/>
+        <p:cNvGrpSpPr/>
+        <p:nvPr/>
+      </p:nvGrpSpPr>
+      <p:grpSpPr>
+        <a:xfrm>
+          <a:off x="0" y="0"/>
+          <a:ext cx="0" cy="0"/>
+          <a:chOff x="0" y="0"/>
+          <a:chExt cx="0" cy="0"/>
+        </a:xfrm>
+      </p:grpSpPr>
+      <p:sp>
+        <p:nvSpPr>
+          <p:cNvPr id="2" name="Title 1">
+            <a:extLst>
+              <a:ext uri="{FF2B5EF4-FFF2-40B4-BE49-F238E27FC236}">
+                <a16:creationId xmlns:a16="http://schemas.microsoft.com/office/drawing/2014/main" id="{AAE62147-DE6B-33CC-3558-A970C55C4E6A}"/>
+              </a:ext>
+            </a:extLst>
+          </p:cNvPr>
+          <p:cNvSpPr>
+            <a:spLocks noGrp="1"/>
+          </p:cNvSpPr>
+          <p:nvPr>
+            <p:ph type="title"/>
+          </p:nvPr>
+        </p:nvSpPr>
+        <p:spPr/>
+        <p:txBody>
+          <a:bodyPr/>
+          <a:lstStyle/>
+          <a:p>
+            <a:r>
+              <a:rPr lang="en-US" dirty="0"/>
+              <a:t>Global simulation strategy</a:t>
+            </a:r>
+          </a:p>
+        </p:txBody>
+      </p:sp>
+      <p:sp>
+        <p:nvSpPr>
+          <p:cNvPr id="3" name="Content Placeholder 2">
+            <a:extLst>
+              <a:ext uri="{FF2B5EF4-FFF2-40B4-BE49-F238E27FC236}">
+                <a16:creationId xmlns:a16="http://schemas.microsoft.com/office/drawing/2014/main" id="{C421ADDB-0D51-337F-D376-046852AC555D}"/>
+              </a:ext>
+            </a:extLst>
+          </p:cNvPr>
+          <p:cNvSpPr>
+            <a:spLocks noGrp="1"/>
+          </p:cNvSpPr>
+          <p:nvPr>
+            <p:ph idx="1"/>
+          </p:nvPr>
+        </p:nvSpPr>
+        <p:spPr/>
+        <p:txBody>
+          <a:bodyPr/>
+          <a:lstStyle/>
+          <a:p>
+            <a:r>
+              <a:rPr lang="en-US" dirty="0"/>
+              <a:t>Develop optimal photosynthesis model</a:t>
+            </a:r>
+          </a:p>
+          <a:p>
+            <a:r>
+              <a:rPr lang="en-US" dirty="0"/>
+              <a:t>Use globally gridded climate to simulate traits</a:t>
+            </a:r>
+          </a:p>
+          <a:p>
+            <a:r>
+              <a:rPr lang="en-US" dirty="0"/>
+              <a:t>Use PCA to explore trait relationships and clustering</a:t>
+            </a:r>
+          </a:p>
+          <a:p>
+            <a:pPr lvl="1"/>
+            <a:r>
+              <a:rPr lang="en-US" dirty="0"/>
+              <a:t>Carbon uptake (A</a:t>
+            </a:r>
+            <a:r>
+              <a:rPr lang="en-US" baseline="-25000" dirty="0"/>
+              <a:t>net</a:t>
+            </a:r>
+            <a:r>
+              <a:rPr lang="en-US" dirty="0"/>
+              <a:t>)</a:t>
+            </a:r>
+          </a:p>
+          <a:p>
+            <a:pPr lvl="1"/>
+            <a:r>
+              <a:rPr lang="en-US" dirty="0"/>
+              <a:t>Carbon loss (R</a:t>
+            </a:r>
+            <a:r>
+              <a:rPr lang="en-US" baseline="-25000" dirty="0"/>
+              <a:t>d</a:t>
+            </a:r>
+            <a:r>
+              <a:rPr lang="en-US" dirty="0"/>
+              <a:t>)</a:t>
+            </a:r>
+          </a:p>
+          <a:p>
+            <a:pPr lvl="1"/>
+            <a:r>
+              <a:rPr lang="en-US" dirty="0"/>
+              <a:t>Water use for photosynthesis (</a:t>
+            </a:r>
+            <a:r>
+              <a:rPr lang="en-US" dirty="0" err="1"/>
+              <a:t>g</a:t>
+            </a:r>
+            <a:r>
+              <a:rPr lang="en-US" baseline="-25000" dirty="0" err="1"/>
+              <a:t>sw</a:t>
+            </a:r>
+            <a:r>
+              <a:rPr lang="en-US" dirty="0"/>
+              <a:t>)</a:t>
+            </a:r>
+          </a:p>
+          <a:p>
+            <a:pPr lvl="1"/>
+            <a:r>
+              <a:rPr lang="en-US" dirty="0"/>
+              <a:t>Nitrogen use for photosynthesis (</a:t>
+            </a:r>
+            <a:r>
+              <a:rPr lang="en-US" dirty="0" err="1"/>
+              <a:t>N</a:t>
+            </a:r>
+            <a:r>
+              <a:rPr lang="en-US" baseline="-25000" dirty="0" err="1"/>
+              <a:t>photo</a:t>
+            </a:r>
+            <a:r>
+              <a:rPr lang="en-US" dirty="0"/>
+              <a:t>)</a:t>
+            </a:r>
+          </a:p>
+          <a:p>
+            <a:pPr lvl="1"/>
+            <a:r>
+              <a:rPr lang="en-US" dirty="0"/>
+              <a:t>Leaf economics (LMA)</a:t>
+            </a:r>
+          </a:p>
+          <a:p>
+            <a:pPr lvl="1"/>
+            <a:r>
+              <a:rPr lang="en-US" dirty="0"/>
+              <a:t>Least-cost theory (</a:t>
+            </a:r>
+            <a:r>
+              <a:rPr lang="el-GR" dirty="0"/>
+              <a:t>χ)</a:t>
+            </a:r>
+            <a:endParaRPr lang="en-US" dirty="0"/>
+          </a:p>
+          <a:p>
+            <a:pPr lvl="1"/>
+            <a:r>
+              <a:rPr lang="en-US" dirty="0"/>
+              <a:t>Photosynthetic efficiency (</a:t>
+            </a:r>
+            <a:r>
+              <a:rPr lang="en-US" dirty="0" err="1"/>
+              <a:t>iWUE</a:t>
+            </a:r>
+            <a:r>
+              <a:rPr lang="en-US" dirty="0"/>
+              <a:t>, PNUE)</a:t>
+            </a:r>
+          </a:p>
+        </p:txBody>
+      </p:sp>
+    </p:spTree>
+    <p:extLst>
+      <p:ext uri="{BB962C8B-B14F-4D97-AF65-F5344CB8AC3E}">
+        <p14:creationId xmlns:p14="http://schemas.microsoft.com/office/powerpoint/2010/main" val="4206354320"/>
+      </p:ext>
+    </p:extLst>
+  </p:cSld>
+  <p:clrMapOvr>
+    <a:masterClrMapping/>
+  </p:clrMapOvr>
+</p:sld>
+</file>
+
+<file path=ppt/slides/slide14.xml><?xml version="1.0" encoding="utf-8"?>
+<p:sld xmlns:a="http://schemas.openxmlformats.org/drawingml/2006/main" xmlns:r="http://schemas.openxmlformats.org/officeDocument/2006/relationships" xmlns:p="http://schemas.openxmlformats.org/presentationml/2006/main">
+  <p:cSld>
+    <p:spTree>
+      <p:nvGrpSpPr>
+        <p:cNvPr id="1" name="">
+          <a:extLst>
+            <a:ext uri="{FF2B5EF4-FFF2-40B4-BE49-F238E27FC236}">
+              <a16:creationId xmlns:a16="http://schemas.microsoft.com/office/drawing/2014/main" id="{B8284C03-3E0F-39E0-0066-40F44637467B}"/>
+            </a:ext>
+          </a:extLst>
+        </p:cNvPr>
+        <p:cNvGrpSpPr/>
+        <p:nvPr/>
+      </p:nvGrpSpPr>
+      <p:grpSpPr>
+        <a:xfrm>
+          <a:off x="0" y="0"/>
+          <a:ext cx="0" cy="0"/>
+          <a:chOff x="0" y="0"/>
+          <a:chExt cx="0" cy="0"/>
+        </a:xfrm>
+      </p:grpSpPr>
+      <p:sp>
+        <p:nvSpPr>
+          <p:cNvPr id="2" name="Title 1">
+            <a:extLst>
+              <a:ext uri="{FF2B5EF4-FFF2-40B4-BE49-F238E27FC236}">
+                <a16:creationId xmlns:a16="http://schemas.microsoft.com/office/drawing/2014/main" id="{9DB5DF41-119F-EA3A-10C4-66C9D6BD3514}"/>
+              </a:ext>
+            </a:extLst>
+          </p:cNvPr>
+          <p:cNvSpPr>
+            <a:spLocks noGrp="1"/>
+          </p:cNvSpPr>
+          <p:nvPr>
+            <p:ph type="title"/>
+          </p:nvPr>
+        </p:nvSpPr>
+        <p:spPr/>
+        <p:txBody>
+          <a:bodyPr/>
+          <a:lstStyle/>
+          <a:p>
+            <a:r>
+              <a:rPr lang="en-US"/>
+              <a:t>Outline</a:t>
+            </a:r>
+          </a:p>
+        </p:txBody>
+      </p:sp>
+      <p:sp>
+        <p:nvSpPr>
+          <p:cNvPr id="3" name="Content Placeholder 2">
+            <a:extLst>
+              <a:ext uri="{FF2B5EF4-FFF2-40B4-BE49-F238E27FC236}">
+                <a16:creationId xmlns:a16="http://schemas.microsoft.com/office/drawing/2014/main" id="{A084CF93-2D22-6701-03E8-49B19E082C6D}"/>
+              </a:ext>
+            </a:extLst>
+          </p:cNvPr>
+          <p:cNvSpPr>
+            <a:spLocks noGrp="1"/>
+          </p:cNvSpPr>
+          <p:nvPr>
+            <p:ph idx="1"/>
+          </p:nvPr>
+        </p:nvSpPr>
+        <p:spPr/>
+        <p:txBody>
+          <a:bodyPr>
+            <a:normAutofit/>
+          </a:bodyPr>
+          <a:lstStyle/>
+          <a:p>
+            <a:r>
+              <a:rPr lang="en-US" sz="4400" dirty="0">
+                <a:solidFill>
+                  <a:schemeClr val="bg1">
+                    <a:lumMod val="85000"/>
+                  </a:schemeClr>
+                </a:solidFill>
+              </a:rPr>
+              <a:t>Eco-evolutionary optimality theory</a:t>
+            </a:r>
+          </a:p>
+          <a:p>
+            <a:r>
+              <a:rPr lang="en-US" sz="4400" dirty="0">
+                <a:solidFill>
+                  <a:schemeClr val="bg1">
+                    <a:lumMod val="85000"/>
+                  </a:schemeClr>
+                </a:solidFill>
+              </a:rPr>
+              <a:t>Global optimal photosynthetic traits</a:t>
+            </a:r>
+          </a:p>
+          <a:p>
+            <a:r>
+              <a:rPr lang="en-US" sz="4400" dirty="0"/>
+              <a:t>Site-level trait variability</a:t>
+            </a:r>
+          </a:p>
+          <a:p>
+            <a:r>
+              <a:rPr lang="en-US" sz="4400" dirty="0">
+                <a:solidFill>
+                  <a:schemeClr val="bg1">
+                    <a:lumMod val="85000"/>
+                  </a:schemeClr>
+                </a:solidFill>
+              </a:rPr>
+              <a:t>Implications</a:t>
+            </a:r>
+          </a:p>
+        </p:txBody>
+      </p:sp>
+    </p:spTree>
+    <p:extLst>
+      <p:ext uri="{BB962C8B-B14F-4D97-AF65-F5344CB8AC3E}">
+        <p14:creationId xmlns:p14="http://schemas.microsoft.com/office/powerpoint/2010/main" val="4235730130"/>
+      </p:ext>
+    </p:extLst>
+  </p:cSld>
+  <p:clrMapOvr>
+    <a:masterClrMapping/>
+  </p:clrMapOvr>
+</p:sld>
+</file>
+
+<file path=ppt/slides/slide15.xml><?xml version="1.0" encoding="utf-8"?>
+<p:sld xmlns:a="http://schemas.openxmlformats.org/drawingml/2006/main" xmlns:r="http://schemas.openxmlformats.org/officeDocument/2006/relationships" xmlns:p="http://schemas.openxmlformats.org/presentationml/2006/main">
+  <p:cSld>
+    <p:spTree>
+      <p:nvGrpSpPr>
+        <p:cNvPr id="1" name="">
+          <a:extLst>
+            <a:ext uri="{FF2B5EF4-FFF2-40B4-BE49-F238E27FC236}">
+              <a16:creationId xmlns:a16="http://schemas.microsoft.com/office/drawing/2014/main" id="{12E1B8B8-C037-F4A1-D289-E6A187269AD2}"/>
+            </a:ext>
+          </a:extLst>
+        </p:cNvPr>
+        <p:cNvGrpSpPr/>
+        <p:nvPr/>
+      </p:nvGrpSpPr>
+      <p:grpSpPr>
+        <a:xfrm>
+          <a:off x="0" y="0"/>
+          <a:ext cx="0" cy="0"/>
+          <a:chOff x="0" y="0"/>
+          <a:chExt cx="0" cy="0"/>
+        </a:xfrm>
+      </p:grpSpPr>
+      <p:sp>
+        <p:nvSpPr>
+          <p:cNvPr id="2" name="Title 1">
+            <a:extLst>
+              <a:ext uri="{FF2B5EF4-FFF2-40B4-BE49-F238E27FC236}">
+                <a16:creationId xmlns:a16="http://schemas.microsoft.com/office/drawing/2014/main" id="{69BE810A-31E0-ACFF-6F89-1F1CD7662BB8}"/>
+              </a:ext>
+            </a:extLst>
+          </p:cNvPr>
+          <p:cNvSpPr>
+            <a:spLocks noGrp="1"/>
+          </p:cNvSpPr>
+          <p:nvPr>
+            <p:ph type="title"/>
+          </p:nvPr>
+        </p:nvSpPr>
+        <p:spPr/>
+        <p:txBody>
+          <a:bodyPr/>
+          <a:lstStyle/>
+          <a:p>
+            <a:r>
+              <a:rPr lang="en-US"/>
+              <a:t>Outline</a:t>
+            </a:r>
+          </a:p>
+        </p:txBody>
+      </p:sp>
+      <p:sp>
+        <p:nvSpPr>
+          <p:cNvPr id="3" name="Content Placeholder 2">
+            <a:extLst>
+              <a:ext uri="{FF2B5EF4-FFF2-40B4-BE49-F238E27FC236}">
+                <a16:creationId xmlns:a16="http://schemas.microsoft.com/office/drawing/2014/main" id="{7352498B-26F0-433D-577B-2B52ABDFAED2}"/>
+              </a:ext>
+            </a:extLst>
+          </p:cNvPr>
+          <p:cNvSpPr>
+            <a:spLocks noGrp="1"/>
+          </p:cNvSpPr>
+          <p:nvPr>
+            <p:ph idx="1"/>
+          </p:nvPr>
+        </p:nvSpPr>
+        <p:spPr/>
+        <p:txBody>
+          <a:bodyPr>
+            <a:normAutofit/>
+          </a:bodyPr>
+          <a:lstStyle/>
+          <a:p>
+            <a:r>
+              <a:rPr lang="en-US" sz="4400" dirty="0">
+                <a:solidFill>
+                  <a:schemeClr val="bg1">
+                    <a:lumMod val="85000"/>
+                  </a:schemeClr>
+                </a:solidFill>
+              </a:rPr>
+              <a:t>Eco-evolutionary optimality theory</a:t>
+            </a:r>
+          </a:p>
+          <a:p>
+            <a:r>
+              <a:rPr lang="en-US" sz="4400" dirty="0">
+                <a:solidFill>
+                  <a:schemeClr val="bg1">
+                    <a:lumMod val="85000"/>
+                  </a:schemeClr>
+                </a:solidFill>
+              </a:rPr>
+              <a:t>Global optimal photosynthetic traits</a:t>
+            </a:r>
+          </a:p>
+          <a:p>
+            <a:r>
+              <a:rPr lang="en-US" sz="4400" dirty="0">
+                <a:solidFill>
+                  <a:schemeClr val="bg1">
+                    <a:lumMod val="85000"/>
+                  </a:schemeClr>
+                </a:solidFill>
+              </a:rPr>
+              <a:t>Site-level trait variability</a:t>
+            </a:r>
+          </a:p>
+          <a:p>
+            <a:r>
+              <a:rPr lang="en-US" sz="4400" dirty="0"/>
+              <a:t>Implications</a:t>
+            </a:r>
+          </a:p>
+        </p:txBody>
+      </p:sp>
+    </p:spTree>
+    <p:extLst>
+      <p:ext uri="{BB962C8B-B14F-4D97-AF65-F5344CB8AC3E}">
+        <p14:creationId xmlns:p14="http://schemas.microsoft.com/office/powerpoint/2010/main" val="3496507606"/>
+      </p:ext>
+    </p:extLst>
+  </p:cSld>
+  <p:clrMapOvr>
+    <a:masterClrMapping/>
+  </p:clrMapOvr>
+</p:sld>
+</file>
+
+<file path=ppt/slides/slide16.xml><?xml version="1.0" encoding="utf-8"?>
 <p:sld xmlns:a="http://schemas.openxmlformats.org/drawingml/2006/main" xmlns:r="http://schemas.openxmlformats.org/officeDocument/2006/relationships" xmlns:p="http://schemas.openxmlformats.org/presentationml/2006/main">
   <p:cSld>
     <p:spTree>
@@ -3682,7 +4501,7 @@
 </p:sld>
 </file>
 
-<file path=ppt/slides/slide4.xml><?xml version="1.0" encoding="utf-8"?>
+<file path=ppt/slides/slide17.xml><?xml version="1.0" encoding="utf-8"?>
 <p:sld xmlns:a="http://schemas.openxmlformats.org/drawingml/2006/main" xmlns:r="http://schemas.openxmlformats.org/officeDocument/2006/relationships" xmlns:p="http://schemas.openxmlformats.org/presentationml/2006/main">
   <p:cSld>
     <p:spTree>
@@ -3859,6 +4678,996 @@
     <p:extLst>
       <p:ext uri="{BB962C8B-B14F-4D97-AF65-F5344CB8AC3E}">
         <p14:creationId xmlns:p14="http://schemas.microsoft.com/office/powerpoint/2010/main" val="4066695764"/>
+      </p:ext>
+    </p:extLst>
+  </p:cSld>
+  <p:clrMapOvr>
+    <a:masterClrMapping/>
+  </p:clrMapOvr>
+</p:sld>
+</file>
+
+<file path=ppt/slides/slide2.xml><?xml version="1.0" encoding="utf-8"?>
+<p:sld xmlns:a="http://schemas.openxmlformats.org/drawingml/2006/main" xmlns:r="http://schemas.openxmlformats.org/officeDocument/2006/relationships" xmlns:p="http://schemas.openxmlformats.org/presentationml/2006/main">
+  <p:cSld>
+    <p:spTree>
+      <p:nvGrpSpPr>
+        <p:cNvPr id="1" name=""/>
+        <p:cNvGrpSpPr/>
+        <p:nvPr/>
+      </p:nvGrpSpPr>
+      <p:grpSpPr>
+        <a:xfrm>
+          <a:off x="0" y="0"/>
+          <a:ext cx="0" cy="0"/>
+          <a:chOff x="0" y="0"/>
+          <a:chExt cx="0" cy="0"/>
+        </a:xfrm>
+      </p:grpSpPr>
+      <p:sp>
+        <p:nvSpPr>
+          <p:cNvPr id="2" name="Title 1">
+            <a:extLst>
+              <a:ext uri="{FF2B5EF4-FFF2-40B4-BE49-F238E27FC236}">
+                <a16:creationId xmlns:a16="http://schemas.microsoft.com/office/drawing/2014/main" id="{6626E519-EBE0-E18E-942A-F0D040DEC1DD}"/>
+              </a:ext>
+            </a:extLst>
+          </p:cNvPr>
+          <p:cNvSpPr>
+            <a:spLocks noGrp="1"/>
+          </p:cNvSpPr>
+          <p:nvPr>
+            <p:ph type="title"/>
+          </p:nvPr>
+        </p:nvSpPr>
+        <p:spPr/>
+        <p:txBody>
+          <a:bodyPr/>
+          <a:lstStyle/>
+          <a:p>
+            <a:r>
+              <a:rPr lang="en-US"/>
+              <a:t>Outline</a:t>
+            </a:r>
+          </a:p>
+        </p:txBody>
+      </p:sp>
+      <p:sp>
+        <p:nvSpPr>
+          <p:cNvPr id="3" name="Content Placeholder 2">
+            <a:extLst>
+              <a:ext uri="{FF2B5EF4-FFF2-40B4-BE49-F238E27FC236}">
+                <a16:creationId xmlns:a16="http://schemas.microsoft.com/office/drawing/2014/main" id="{C93137A1-6F4C-603B-D5F9-02E085DCB61B}"/>
+              </a:ext>
+            </a:extLst>
+          </p:cNvPr>
+          <p:cNvSpPr>
+            <a:spLocks noGrp="1"/>
+          </p:cNvSpPr>
+          <p:nvPr>
+            <p:ph idx="1"/>
+          </p:nvPr>
+        </p:nvSpPr>
+        <p:spPr/>
+        <p:txBody>
+          <a:bodyPr>
+            <a:normAutofit/>
+          </a:bodyPr>
+          <a:lstStyle/>
+          <a:p>
+            <a:r>
+              <a:rPr lang="en-US" sz="4400" dirty="0"/>
+              <a:t>Eco-evolutionary optimality theory</a:t>
+            </a:r>
+          </a:p>
+          <a:p>
+            <a:r>
+              <a:rPr lang="en-US" sz="4400" dirty="0"/>
+              <a:t>Global optimal photosynthetic traits</a:t>
+            </a:r>
+          </a:p>
+          <a:p>
+            <a:r>
+              <a:rPr lang="en-US" sz="4400" dirty="0"/>
+              <a:t>Site-level trait variability</a:t>
+            </a:r>
+          </a:p>
+          <a:p>
+            <a:r>
+              <a:rPr lang="en-US" sz="4400" dirty="0"/>
+              <a:t>Implications</a:t>
+            </a:r>
+          </a:p>
+        </p:txBody>
+      </p:sp>
+    </p:spTree>
+    <p:extLst>
+      <p:ext uri="{BB962C8B-B14F-4D97-AF65-F5344CB8AC3E}">
+        <p14:creationId xmlns:p14="http://schemas.microsoft.com/office/powerpoint/2010/main" val="2340562297"/>
+      </p:ext>
+    </p:extLst>
+  </p:cSld>
+  <p:clrMapOvr>
+    <a:masterClrMapping/>
+  </p:clrMapOvr>
+</p:sld>
+</file>
+
+<file path=ppt/slides/slide3.xml><?xml version="1.0" encoding="utf-8"?>
+<p:sld xmlns:a="http://schemas.openxmlformats.org/drawingml/2006/main" xmlns:r="http://schemas.openxmlformats.org/officeDocument/2006/relationships" xmlns:p="http://schemas.openxmlformats.org/presentationml/2006/main">
+  <p:cSld>
+    <p:spTree>
+      <p:nvGrpSpPr>
+        <p:cNvPr id="1" name="">
+          <a:extLst>
+            <a:ext uri="{FF2B5EF4-FFF2-40B4-BE49-F238E27FC236}">
+              <a16:creationId xmlns:a16="http://schemas.microsoft.com/office/drawing/2014/main" id="{A8B34709-2F8C-B9CB-2062-96B5E23BEF7B}"/>
+            </a:ext>
+          </a:extLst>
+        </p:cNvPr>
+        <p:cNvGrpSpPr/>
+        <p:nvPr/>
+      </p:nvGrpSpPr>
+      <p:grpSpPr>
+        <a:xfrm>
+          <a:off x="0" y="0"/>
+          <a:ext cx="0" cy="0"/>
+          <a:chOff x="0" y="0"/>
+          <a:chExt cx="0" cy="0"/>
+        </a:xfrm>
+      </p:grpSpPr>
+      <p:sp>
+        <p:nvSpPr>
+          <p:cNvPr id="2" name="Title 1">
+            <a:extLst>
+              <a:ext uri="{FF2B5EF4-FFF2-40B4-BE49-F238E27FC236}">
+                <a16:creationId xmlns:a16="http://schemas.microsoft.com/office/drawing/2014/main" id="{4832B2D9-7B19-3245-AC2B-7A555742C21E}"/>
+              </a:ext>
+            </a:extLst>
+          </p:cNvPr>
+          <p:cNvSpPr>
+            <a:spLocks noGrp="1"/>
+          </p:cNvSpPr>
+          <p:nvPr>
+            <p:ph type="title"/>
+          </p:nvPr>
+        </p:nvSpPr>
+        <p:spPr/>
+        <p:txBody>
+          <a:bodyPr/>
+          <a:lstStyle/>
+          <a:p>
+            <a:r>
+              <a:rPr lang="en-US"/>
+              <a:t>Outline</a:t>
+            </a:r>
+          </a:p>
+        </p:txBody>
+      </p:sp>
+      <p:sp>
+        <p:nvSpPr>
+          <p:cNvPr id="3" name="Content Placeholder 2">
+            <a:extLst>
+              <a:ext uri="{FF2B5EF4-FFF2-40B4-BE49-F238E27FC236}">
+                <a16:creationId xmlns:a16="http://schemas.microsoft.com/office/drawing/2014/main" id="{214164E8-FE1B-A86B-AEF9-8F2E0D69722F}"/>
+              </a:ext>
+            </a:extLst>
+          </p:cNvPr>
+          <p:cNvSpPr>
+            <a:spLocks noGrp="1"/>
+          </p:cNvSpPr>
+          <p:nvPr>
+            <p:ph idx="1"/>
+          </p:nvPr>
+        </p:nvSpPr>
+        <p:spPr/>
+        <p:txBody>
+          <a:bodyPr>
+            <a:normAutofit/>
+          </a:bodyPr>
+          <a:lstStyle/>
+          <a:p>
+            <a:r>
+              <a:rPr lang="en-US" sz="4400" dirty="0"/>
+              <a:t>Eco-evolutionary optimality theory</a:t>
+            </a:r>
+          </a:p>
+          <a:p>
+            <a:r>
+              <a:rPr lang="en-US" sz="4400" dirty="0">
+                <a:solidFill>
+                  <a:schemeClr val="bg1">
+                    <a:lumMod val="85000"/>
+                  </a:schemeClr>
+                </a:solidFill>
+              </a:rPr>
+              <a:t>Global optimal photosynthetic traits</a:t>
+            </a:r>
+          </a:p>
+          <a:p>
+            <a:r>
+              <a:rPr lang="en-US" sz="4400" dirty="0">
+                <a:solidFill>
+                  <a:schemeClr val="bg1">
+                    <a:lumMod val="85000"/>
+                  </a:schemeClr>
+                </a:solidFill>
+              </a:rPr>
+              <a:t>Site-level trait variability</a:t>
+            </a:r>
+          </a:p>
+          <a:p>
+            <a:r>
+              <a:rPr lang="en-US" sz="4400" dirty="0">
+                <a:solidFill>
+                  <a:schemeClr val="bg1">
+                    <a:lumMod val="85000"/>
+                  </a:schemeClr>
+                </a:solidFill>
+              </a:rPr>
+              <a:t>Implications</a:t>
+            </a:r>
+          </a:p>
+        </p:txBody>
+      </p:sp>
+    </p:spTree>
+    <p:extLst>
+      <p:ext uri="{BB962C8B-B14F-4D97-AF65-F5344CB8AC3E}">
+        <p14:creationId xmlns:p14="http://schemas.microsoft.com/office/powerpoint/2010/main" val="1601413415"/>
+      </p:ext>
+    </p:extLst>
+  </p:cSld>
+  <p:clrMapOvr>
+    <a:masterClrMapping/>
+  </p:clrMapOvr>
+</p:sld>
+</file>
+
+<file path=ppt/slides/slide4.xml><?xml version="1.0" encoding="utf-8"?>
+<p:sld xmlns:a="http://schemas.openxmlformats.org/drawingml/2006/main" xmlns:r="http://schemas.openxmlformats.org/officeDocument/2006/relationships" xmlns:p="http://schemas.openxmlformats.org/presentationml/2006/main">
+  <p:cSld>
+    <p:spTree>
+      <p:nvGrpSpPr>
+        <p:cNvPr id="1" name=""/>
+        <p:cNvGrpSpPr/>
+        <p:nvPr/>
+      </p:nvGrpSpPr>
+      <p:grpSpPr>
+        <a:xfrm>
+          <a:off x="0" y="0"/>
+          <a:ext cx="0" cy="0"/>
+          <a:chOff x="0" y="0"/>
+          <a:chExt cx="0" cy="0"/>
+        </a:xfrm>
+      </p:grpSpPr>
+      <p:sp>
+        <p:nvSpPr>
+          <p:cNvPr id="2" name="Title 1">
+            <a:extLst>
+              <a:ext uri="{FF2B5EF4-FFF2-40B4-BE49-F238E27FC236}">
+                <a16:creationId xmlns:a16="http://schemas.microsoft.com/office/drawing/2014/main" id="{3761B62A-C9B4-4A8D-9F7C-67F1C0441BEA}"/>
+              </a:ext>
+            </a:extLst>
+          </p:cNvPr>
+          <p:cNvSpPr>
+            <a:spLocks noGrp="1"/>
+          </p:cNvSpPr>
+          <p:nvPr>
+            <p:ph type="title"/>
+          </p:nvPr>
+        </p:nvSpPr>
+        <p:spPr/>
+        <p:txBody>
+          <a:bodyPr/>
+          <a:lstStyle/>
+          <a:p>
+            <a:r>
+              <a:rPr lang="en-US" dirty="0"/>
+              <a:t>Eco-evolutionary optimality theory</a:t>
+            </a:r>
+          </a:p>
+        </p:txBody>
+      </p:sp>
+      <p:sp>
+        <p:nvSpPr>
+          <p:cNvPr id="3" name="Content Placeholder 2">
+            <a:extLst>
+              <a:ext uri="{FF2B5EF4-FFF2-40B4-BE49-F238E27FC236}">
+                <a16:creationId xmlns:a16="http://schemas.microsoft.com/office/drawing/2014/main" id="{B40DF3F7-3B03-4704-B6ED-F46CFD4020C3}"/>
+              </a:ext>
+            </a:extLst>
+          </p:cNvPr>
+          <p:cNvSpPr>
+            <a:spLocks noGrp="1"/>
+          </p:cNvSpPr>
+          <p:nvPr>
+            <p:ph idx="1"/>
+          </p:nvPr>
+        </p:nvSpPr>
+        <p:spPr/>
+        <p:txBody>
+          <a:bodyPr>
+            <a:normAutofit/>
+          </a:bodyPr>
+          <a:lstStyle/>
+          <a:p>
+            <a:pPr marL="0" indent="0">
+              <a:buNone/>
+            </a:pPr>
+            <a:r>
+              <a:rPr lang="en-US" sz="3200" dirty="0"/>
+              <a:t> “EEO invokes the power of natural selection to eliminate uncompetitive trait combinations, and thereby shape predictable, general patterns in vegetation”</a:t>
+            </a:r>
+          </a:p>
+        </p:txBody>
+      </p:sp>
+      <p:pic>
+        <p:nvPicPr>
+          <p:cNvPr id="4" name="Picture 3" descr="Graphical user interface, text, application&#10;&#10;Description automatically generated">
+            <a:extLst>
+              <a:ext uri="{FF2B5EF4-FFF2-40B4-BE49-F238E27FC236}">
+                <a16:creationId xmlns:a16="http://schemas.microsoft.com/office/drawing/2014/main" id="{FB9414E6-FB36-4172-15F1-48A4ADC72704}"/>
+              </a:ext>
+            </a:extLst>
+          </p:cNvPr>
+          <p:cNvPicPr>
+            <a:picLocks noChangeAspect="1"/>
+          </p:cNvPicPr>
+          <p:nvPr/>
+        </p:nvPicPr>
+        <p:blipFill>
+          <a:blip r:embed="rId2"/>
+          <a:stretch>
+            <a:fillRect/>
+          </a:stretch>
+        </p:blipFill>
+        <p:spPr>
+          <a:xfrm>
+            <a:off x="1978854" y="3863711"/>
+            <a:ext cx="8234291" cy="2791089"/>
+          </a:xfrm>
+          <a:prstGeom prst="rect">
+            <a:avLst/>
+          </a:prstGeom>
+          <a:ln w="76200">
+            <a:solidFill>
+              <a:schemeClr val="tx1"/>
+            </a:solidFill>
+          </a:ln>
+        </p:spPr>
+      </p:pic>
+    </p:spTree>
+    <p:extLst>
+      <p:ext uri="{BB962C8B-B14F-4D97-AF65-F5344CB8AC3E}">
+        <p14:creationId xmlns:p14="http://schemas.microsoft.com/office/powerpoint/2010/main" val="3362164842"/>
+      </p:ext>
+    </p:extLst>
+  </p:cSld>
+  <p:clrMapOvr>
+    <a:masterClrMapping/>
+  </p:clrMapOvr>
+</p:sld>
+</file>
+
+<file path=ppt/slides/slide5.xml><?xml version="1.0" encoding="utf-8"?>
+<p:sld xmlns:a="http://schemas.openxmlformats.org/drawingml/2006/main" xmlns:r="http://schemas.openxmlformats.org/officeDocument/2006/relationships" xmlns:p="http://schemas.openxmlformats.org/presentationml/2006/main">
+  <p:cSld>
+    <p:spTree>
+      <p:nvGrpSpPr>
+        <p:cNvPr id="1" name=""/>
+        <p:cNvGrpSpPr/>
+        <p:nvPr/>
+      </p:nvGrpSpPr>
+      <p:grpSpPr>
+        <a:xfrm>
+          <a:off x="0" y="0"/>
+          <a:ext cx="0" cy="0"/>
+          <a:chOff x="0" y="0"/>
+          <a:chExt cx="0" cy="0"/>
+        </a:xfrm>
+      </p:grpSpPr>
+      <p:sp>
+        <p:nvSpPr>
+          <p:cNvPr id="2" name="Title 1">
+            <a:extLst>
+              <a:ext uri="{FF2B5EF4-FFF2-40B4-BE49-F238E27FC236}">
+                <a16:creationId xmlns:a16="http://schemas.microsoft.com/office/drawing/2014/main" id="{A7B47F62-C540-4B11-CA17-53964EA483ED}"/>
+              </a:ext>
+            </a:extLst>
+          </p:cNvPr>
+          <p:cNvSpPr>
+            <a:spLocks noGrp="1"/>
+          </p:cNvSpPr>
+          <p:nvPr>
+            <p:ph type="title"/>
+          </p:nvPr>
+        </p:nvSpPr>
+        <p:spPr/>
+        <p:txBody>
+          <a:bodyPr/>
+          <a:lstStyle/>
+          <a:p>
+            <a:r>
+              <a:rPr lang="en-US" dirty="0"/>
+              <a:t>Photosynthesis optimization: least cost</a:t>
+            </a:r>
+          </a:p>
+        </p:txBody>
+      </p:sp>
+      <p:sp>
+        <p:nvSpPr>
+          <p:cNvPr id="3" name="Content Placeholder 2">
+            <a:extLst>
+              <a:ext uri="{FF2B5EF4-FFF2-40B4-BE49-F238E27FC236}">
+                <a16:creationId xmlns:a16="http://schemas.microsoft.com/office/drawing/2014/main" id="{6896E0C2-9276-EF2E-4F42-00D1613411A1}"/>
+              </a:ext>
+            </a:extLst>
+          </p:cNvPr>
+          <p:cNvSpPr>
+            <a:spLocks noGrp="1"/>
+          </p:cNvSpPr>
+          <p:nvPr>
+            <p:ph idx="1"/>
+          </p:nvPr>
+        </p:nvSpPr>
+        <p:spPr/>
+        <p:txBody>
+          <a:bodyPr>
+            <a:normAutofit/>
+          </a:bodyPr>
+          <a:lstStyle/>
+          <a:p>
+            <a:pPr marL="0" indent="0">
+              <a:buNone/>
+            </a:pPr>
+            <a:r>
+              <a:rPr lang="en-US" sz="5400" dirty="0">
+                <a:solidFill>
+                  <a:srgbClr val="011893"/>
+                </a:solidFill>
+              </a:rPr>
+              <a:t>Optimally, plants will maintain fastest rate of photosynthesis at the lowest summed resource cost (water and nutrient use)</a:t>
+            </a:r>
+          </a:p>
+        </p:txBody>
+      </p:sp>
+    </p:spTree>
+    <p:extLst>
+      <p:ext uri="{BB962C8B-B14F-4D97-AF65-F5344CB8AC3E}">
+        <p14:creationId xmlns:p14="http://schemas.microsoft.com/office/powerpoint/2010/main" val="191338421"/>
+      </p:ext>
+    </p:extLst>
+  </p:cSld>
+  <p:clrMapOvr>
+    <a:masterClrMapping/>
+  </p:clrMapOvr>
+</p:sld>
+</file>
+
+<file path=ppt/slides/slide6.xml><?xml version="1.0" encoding="utf-8"?>
+<p:sld xmlns:a="http://schemas.openxmlformats.org/drawingml/2006/main" xmlns:r="http://schemas.openxmlformats.org/officeDocument/2006/relationships" xmlns:p="http://schemas.openxmlformats.org/presentationml/2006/main">
+  <p:cSld>
+    <p:spTree>
+      <p:nvGrpSpPr>
+        <p:cNvPr id="1" name=""/>
+        <p:cNvGrpSpPr/>
+        <p:nvPr/>
+      </p:nvGrpSpPr>
+      <p:grpSpPr>
+        <a:xfrm>
+          <a:off x="0" y="0"/>
+          <a:ext cx="0" cy="0"/>
+          <a:chOff x="0" y="0"/>
+          <a:chExt cx="0" cy="0"/>
+        </a:xfrm>
+      </p:grpSpPr>
+      <p:sp>
+        <p:nvSpPr>
+          <p:cNvPr id="2" name="Title 1">
+            <a:extLst>
+              <a:ext uri="{FF2B5EF4-FFF2-40B4-BE49-F238E27FC236}">
+                <a16:creationId xmlns:a16="http://schemas.microsoft.com/office/drawing/2014/main" id="{4E715269-8B2C-B845-B4E6-10EDE8B61A56}"/>
+              </a:ext>
+            </a:extLst>
+          </p:cNvPr>
+          <p:cNvSpPr>
+            <a:spLocks noGrp="1"/>
+          </p:cNvSpPr>
+          <p:nvPr>
+            <p:ph type="title"/>
+          </p:nvPr>
+        </p:nvSpPr>
+        <p:spPr/>
+        <p:txBody>
+          <a:bodyPr/>
+          <a:lstStyle/>
+          <a:p>
+            <a:r>
+              <a:rPr lang="en-US" b="1" u="sng" dirty="0"/>
+              <a:t>Optimal trait example</a:t>
+            </a:r>
+            <a:br>
+              <a:rPr lang="en-US" dirty="0"/>
+            </a:br>
+            <a:r>
+              <a:rPr lang="en-US" dirty="0"/>
+              <a:t>The maximum rate of Rubisco carboxylation (</a:t>
+            </a:r>
+            <a:r>
+              <a:rPr lang="en-US" i="1" dirty="0" err="1">
+                <a:solidFill>
+                  <a:srgbClr val="011893"/>
+                </a:solidFill>
+              </a:rPr>
+              <a:t>V</a:t>
+            </a:r>
+            <a:r>
+              <a:rPr lang="en-US" baseline="-25000" dirty="0" err="1">
+                <a:solidFill>
+                  <a:srgbClr val="011893"/>
+                </a:solidFill>
+              </a:rPr>
+              <a:t>cmax</a:t>
+            </a:r>
+            <a:r>
+              <a:rPr lang="en-US" dirty="0"/>
+              <a:t>)</a:t>
+            </a:r>
+          </a:p>
+        </p:txBody>
+      </p:sp>
+      <p:sp>
+        <p:nvSpPr>
+          <p:cNvPr id="3" name="Text Placeholder 2">
+            <a:extLst>
+              <a:ext uri="{FF2B5EF4-FFF2-40B4-BE49-F238E27FC236}">
+                <a16:creationId xmlns:a16="http://schemas.microsoft.com/office/drawing/2014/main" id="{4B5302AC-BCAE-5743-98C7-B877F4D1D816}"/>
+              </a:ext>
+            </a:extLst>
+          </p:cNvPr>
+          <p:cNvSpPr>
+            <a:spLocks noGrp="1"/>
+          </p:cNvSpPr>
+          <p:nvPr>
+            <p:ph type="body" idx="1"/>
+          </p:nvPr>
+        </p:nvSpPr>
+        <p:spPr/>
+        <p:txBody>
+          <a:bodyPr/>
+          <a:lstStyle/>
+          <a:p>
+            <a:endParaRPr lang="en-US"/>
+          </a:p>
+        </p:txBody>
+      </p:sp>
+    </p:spTree>
+    <p:extLst>
+      <p:ext uri="{BB962C8B-B14F-4D97-AF65-F5344CB8AC3E}">
+        <p14:creationId xmlns:p14="http://schemas.microsoft.com/office/powerpoint/2010/main" val="3720876740"/>
+      </p:ext>
+    </p:extLst>
+  </p:cSld>
+  <p:clrMapOvr>
+    <a:masterClrMapping/>
+  </p:clrMapOvr>
+</p:sld>
+</file>
+
+<file path=ppt/slides/slide7.xml><?xml version="1.0" encoding="utf-8"?>
+<p:sld xmlns:a="http://schemas.openxmlformats.org/drawingml/2006/main" xmlns:r="http://schemas.openxmlformats.org/officeDocument/2006/relationships" xmlns:p="http://schemas.openxmlformats.org/presentationml/2006/main">
+  <p:cSld>
+    <p:spTree>
+      <p:nvGrpSpPr>
+        <p:cNvPr id="1" name=""/>
+        <p:cNvGrpSpPr/>
+        <p:nvPr/>
+      </p:nvGrpSpPr>
+      <p:grpSpPr>
+        <a:xfrm>
+          <a:off x="0" y="0"/>
+          <a:ext cx="0" cy="0"/>
+          <a:chOff x="0" y="0"/>
+          <a:chExt cx="0" cy="0"/>
+        </a:xfrm>
+      </p:grpSpPr>
+      <p:sp>
+        <p:nvSpPr>
+          <p:cNvPr id="4" name="TextBox 3">
+            <a:extLst>
+              <a:ext uri="{FF2B5EF4-FFF2-40B4-BE49-F238E27FC236}">
+                <a16:creationId xmlns:a16="http://schemas.microsoft.com/office/drawing/2014/main" id="{1AF285EF-B54B-EC47-979F-5BC743D49492}"/>
+              </a:ext>
+            </a:extLst>
+          </p:cNvPr>
+          <p:cNvSpPr txBox="1"/>
+          <p:nvPr/>
+        </p:nvSpPr>
+        <p:spPr>
+          <a:xfrm>
+            <a:off x="7942997" y="2129051"/>
+            <a:ext cx="3753135" cy="2862322"/>
+          </a:xfrm>
+          <a:prstGeom prst="rect">
+            <a:avLst/>
+          </a:prstGeom>
+          <a:noFill/>
+        </p:spPr>
+        <p:txBody>
+          <a:bodyPr wrap="square" rtlCol="0">
+            <a:spAutoFit/>
+          </a:bodyPr>
+          <a:lstStyle/>
+          <a:p>
+            <a:r>
+              <a:rPr lang="en-US" sz="3600" i="1" dirty="0" err="1">
+                <a:solidFill>
+                  <a:srgbClr val="011893"/>
+                </a:solidFill>
+                <a:cs typeface="Calibri" panose="020F0502020204030204" pitchFamily="34" charset="0"/>
+              </a:rPr>
+              <a:t>V</a:t>
+            </a:r>
+            <a:r>
+              <a:rPr lang="en-US" sz="3600" baseline="-25000" dirty="0" err="1">
+                <a:solidFill>
+                  <a:srgbClr val="011893"/>
+                </a:solidFill>
+                <a:cs typeface="Calibri" panose="020F0502020204030204" pitchFamily="34" charset="0"/>
+              </a:rPr>
+              <a:t>cmax</a:t>
+            </a:r>
+            <a:r>
+              <a:rPr lang="en-US" sz="3600" dirty="0">
+                <a:solidFill>
+                  <a:srgbClr val="011893"/>
+                </a:solidFill>
+                <a:cs typeface="Calibri" panose="020F0502020204030204" pitchFamily="34" charset="0"/>
+              </a:rPr>
+              <a:t> increases with light because of greater electron transport</a:t>
+            </a:r>
+            <a:endParaRPr lang="en-US" sz="3600" dirty="0">
+              <a:solidFill>
+                <a:srgbClr val="011893"/>
+              </a:solidFill>
+            </a:endParaRPr>
+          </a:p>
+        </p:txBody>
+      </p:sp>
+      <p:pic>
+        <p:nvPicPr>
+          <p:cNvPr id="3" name="Picture 2">
+            <a:extLst>
+              <a:ext uri="{FF2B5EF4-FFF2-40B4-BE49-F238E27FC236}">
+                <a16:creationId xmlns:a16="http://schemas.microsoft.com/office/drawing/2014/main" id="{8D9A7696-BB68-0144-BB52-D3C03FD0676A}"/>
+              </a:ext>
+            </a:extLst>
+          </p:cNvPr>
+          <p:cNvPicPr>
+            <a:picLocks noChangeAspect="1"/>
+          </p:cNvPicPr>
+          <p:nvPr/>
+        </p:nvPicPr>
+        <p:blipFill>
+          <a:blip r:embed="rId2" cstate="hqprint">
+            <a:extLst>
+              <a:ext uri="{28A0092B-C50C-407E-A947-70E740481C1C}">
+                <a14:useLocalDpi xmlns:a14="http://schemas.microsoft.com/office/drawing/2010/main"/>
+              </a:ext>
+            </a:extLst>
+          </a:blip>
+          <a:stretch>
+            <a:fillRect/>
+          </a:stretch>
+        </p:blipFill>
+        <p:spPr>
+          <a:xfrm>
+            <a:off x="0" y="0"/>
+            <a:ext cx="6858000" cy="6858000"/>
+          </a:xfrm>
+          <a:prstGeom prst="rect">
+            <a:avLst/>
+          </a:prstGeom>
+        </p:spPr>
+      </p:pic>
+    </p:spTree>
+    <p:extLst>
+      <p:ext uri="{BB962C8B-B14F-4D97-AF65-F5344CB8AC3E}">
+        <p14:creationId xmlns:p14="http://schemas.microsoft.com/office/powerpoint/2010/main" val="4148899268"/>
+      </p:ext>
+    </p:extLst>
+  </p:cSld>
+  <p:clrMapOvr>
+    <a:masterClrMapping/>
+  </p:clrMapOvr>
+</p:sld>
+</file>
+
+<file path=ppt/slides/slide8.xml><?xml version="1.0" encoding="utf-8"?>
+<p:sld xmlns:a="http://schemas.openxmlformats.org/drawingml/2006/main" xmlns:r="http://schemas.openxmlformats.org/officeDocument/2006/relationships" xmlns:p="http://schemas.openxmlformats.org/presentationml/2006/main">
+  <p:cSld>
+    <p:spTree>
+      <p:nvGrpSpPr>
+        <p:cNvPr id="1" name=""/>
+        <p:cNvGrpSpPr/>
+        <p:nvPr/>
+      </p:nvGrpSpPr>
+      <p:grpSpPr>
+        <a:xfrm>
+          <a:off x="0" y="0"/>
+          <a:ext cx="0" cy="0"/>
+          <a:chOff x="0" y="0"/>
+          <a:chExt cx="0" cy="0"/>
+        </a:xfrm>
+      </p:grpSpPr>
+      <p:sp>
+        <p:nvSpPr>
+          <p:cNvPr id="4" name="TextBox 3">
+            <a:extLst>
+              <a:ext uri="{FF2B5EF4-FFF2-40B4-BE49-F238E27FC236}">
+                <a16:creationId xmlns:a16="http://schemas.microsoft.com/office/drawing/2014/main" id="{1AF285EF-B54B-EC47-979F-5BC743D49492}"/>
+              </a:ext>
+            </a:extLst>
+          </p:cNvPr>
+          <p:cNvSpPr txBox="1"/>
+          <p:nvPr/>
+        </p:nvSpPr>
+        <p:spPr>
+          <a:xfrm>
+            <a:off x="7942997" y="2129051"/>
+            <a:ext cx="3753135" cy="3416320"/>
+          </a:xfrm>
+          <a:prstGeom prst="rect">
+            <a:avLst/>
+          </a:prstGeom>
+          <a:noFill/>
+        </p:spPr>
+        <p:txBody>
+          <a:bodyPr wrap="square" rtlCol="0">
+            <a:spAutoFit/>
+          </a:bodyPr>
+          <a:lstStyle/>
+          <a:p>
+            <a:r>
+              <a:rPr lang="en-US" sz="3600" i="1" dirty="0" err="1">
+                <a:solidFill>
+                  <a:srgbClr val="011893"/>
+                </a:solidFill>
+                <a:cs typeface="Calibri" panose="020F0502020204030204" pitchFamily="34" charset="0"/>
+              </a:rPr>
+              <a:t>V</a:t>
+            </a:r>
+            <a:r>
+              <a:rPr lang="en-US" sz="3600" baseline="-25000" dirty="0" err="1">
+                <a:solidFill>
+                  <a:srgbClr val="011893"/>
+                </a:solidFill>
+                <a:cs typeface="Calibri" panose="020F0502020204030204" pitchFamily="34" charset="0"/>
+              </a:rPr>
+              <a:t>cmax</a:t>
+            </a:r>
+            <a:r>
+              <a:rPr lang="en-US" sz="3600" dirty="0">
+                <a:solidFill>
+                  <a:srgbClr val="011893"/>
+                </a:solidFill>
+                <a:cs typeface="Calibri" panose="020F0502020204030204" pitchFamily="34" charset="0"/>
+              </a:rPr>
+              <a:t> increases with temperature because of greater electron transport and photorespiration</a:t>
+            </a:r>
+            <a:endParaRPr lang="en-US" sz="3600" dirty="0">
+              <a:solidFill>
+                <a:srgbClr val="011893"/>
+              </a:solidFill>
+            </a:endParaRPr>
+          </a:p>
+        </p:txBody>
+      </p:sp>
+      <p:pic>
+        <p:nvPicPr>
+          <p:cNvPr id="3" name="Picture 2">
+            <a:extLst>
+              <a:ext uri="{FF2B5EF4-FFF2-40B4-BE49-F238E27FC236}">
+                <a16:creationId xmlns:a16="http://schemas.microsoft.com/office/drawing/2014/main" id="{A9683761-BAA1-0243-8062-791C68C9458E}"/>
+              </a:ext>
+            </a:extLst>
+          </p:cNvPr>
+          <p:cNvPicPr>
+            <a:picLocks noChangeAspect="1"/>
+          </p:cNvPicPr>
+          <p:nvPr/>
+        </p:nvPicPr>
+        <p:blipFill>
+          <a:blip r:embed="rId2" cstate="hqprint">
+            <a:extLst>
+              <a:ext uri="{28A0092B-C50C-407E-A947-70E740481C1C}">
+                <a14:useLocalDpi xmlns:a14="http://schemas.microsoft.com/office/drawing/2010/main"/>
+              </a:ext>
+            </a:extLst>
+          </a:blip>
+          <a:stretch>
+            <a:fillRect/>
+          </a:stretch>
+        </p:blipFill>
+        <p:spPr>
+          <a:xfrm>
+            <a:off x="0" y="0"/>
+            <a:ext cx="6858000" cy="6858000"/>
+          </a:xfrm>
+          <a:prstGeom prst="rect">
+            <a:avLst/>
+          </a:prstGeom>
+        </p:spPr>
+      </p:pic>
+    </p:spTree>
+    <p:extLst>
+      <p:ext uri="{BB962C8B-B14F-4D97-AF65-F5344CB8AC3E}">
+        <p14:creationId xmlns:p14="http://schemas.microsoft.com/office/powerpoint/2010/main" val="3870854692"/>
+      </p:ext>
+    </p:extLst>
+  </p:cSld>
+  <p:clrMapOvr>
+    <a:masterClrMapping/>
+  </p:clrMapOvr>
+</p:sld>
+</file>
+
+<file path=ppt/slides/slide9.xml><?xml version="1.0" encoding="utf-8"?>
+<p:sld xmlns:a="http://schemas.openxmlformats.org/drawingml/2006/main" xmlns:r="http://schemas.openxmlformats.org/officeDocument/2006/relationships" xmlns:p="http://schemas.openxmlformats.org/presentationml/2006/main">
+  <p:cSld>
+    <p:spTree>
+      <p:nvGrpSpPr>
+        <p:cNvPr id="1" name=""/>
+        <p:cNvGrpSpPr/>
+        <p:nvPr/>
+      </p:nvGrpSpPr>
+      <p:grpSpPr>
+        <a:xfrm>
+          <a:off x="0" y="0"/>
+          <a:ext cx="0" cy="0"/>
+          <a:chOff x="0" y="0"/>
+          <a:chExt cx="0" cy="0"/>
+        </a:xfrm>
+      </p:grpSpPr>
+      <p:sp>
+        <p:nvSpPr>
+          <p:cNvPr id="4" name="TextBox 3">
+            <a:extLst>
+              <a:ext uri="{FF2B5EF4-FFF2-40B4-BE49-F238E27FC236}">
+                <a16:creationId xmlns:a16="http://schemas.microsoft.com/office/drawing/2014/main" id="{1AF285EF-B54B-EC47-979F-5BC743D49492}"/>
+              </a:ext>
+            </a:extLst>
+          </p:cNvPr>
+          <p:cNvSpPr txBox="1"/>
+          <p:nvPr/>
+        </p:nvSpPr>
+        <p:spPr>
+          <a:xfrm>
+            <a:off x="7942997" y="2129051"/>
+            <a:ext cx="3753135" cy="2862322"/>
+          </a:xfrm>
+          <a:prstGeom prst="rect">
+            <a:avLst/>
+          </a:prstGeom>
+          <a:noFill/>
+        </p:spPr>
+        <p:txBody>
+          <a:bodyPr wrap="square" rtlCol="0">
+            <a:spAutoFit/>
+          </a:bodyPr>
+          <a:lstStyle/>
+          <a:p>
+            <a:r>
+              <a:rPr lang="en-US" sz="3600" i="1" dirty="0" err="1">
+                <a:solidFill>
+                  <a:srgbClr val="011893"/>
+                </a:solidFill>
+                <a:cs typeface="Calibri" panose="020F0502020204030204" pitchFamily="34" charset="0"/>
+              </a:rPr>
+              <a:t>V</a:t>
+            </a:r>
+            <a:r>
+              <a:rPr lang="en-US" sz="3600" baseline="-25000" dirty="0" err="1">
+                <a:solidFill>
+                  <a:srgbClr val="011893"/>
+                </a:solidFill>
+                <a:cs typeface="Calibri" panose="020F0502020204030204" pitchFamily="34" charset="0"/>
+              </a:rPr>
+              <a:t>cmax</a:t>
+            </a:r>
+            <a:r>
+              <a:rPr lang="en-US" sz="3600" dirty="0">
+                <a:solidFill>
+                  <a:srgbClr val="011893"/>
+                </a:solidFill>
+                <a:cs typeface="Calibri" panose="020F0502020204030204" pitchFamily="34" charset="0"/>
+              </a:rPr>
+              <a:t> decreases with CO</a:t>
+            </a:r>
+            <a:r>
+              <a:rPr lang="en-US" sz="3600" baseline="-25000" dirty="0">
+                <a:solidFill>
+                  <a:srgbClr val="011893"/>
+                </a:solidFill>
+                <a:cs typeface="Calibri" panose="020F0502020204030204" pitchFamily="34" charset="0"/>
+              </a:rPr>
+              <a:t>2</a:t>
+            </a:r>
+            <a:r>
+              <a:rPr lang="en-US" sz="3600" dirty="0">
+                <a:solidFill>
+                  <a:srgbClr val="011893"/>
+                </a:solidFill>
+                <a:cs typeface="Calibri" panose="020F0502020204030204" pitchFamily="34" charset="0"/>
+              </a:rPr>
+              <a:t> because of greater CO</a:t>
+            </a:r>
+            <a:r>
+              <a:rPr lang="en-US" sz="3600" baseline="-25000" dirty="0">
+                <a:solidFill>
+                  <a:srgbClr val="011893"/>
+                </a:solidFill>
+                <a:cs typeface="Calibri" panose="020F0502020204030204" pitchFamily="34" charset="0"/>
+              </a:rPr>
+              <a:t>2</a:t>
+            </a:r>
+            <a:r>
+              <a:rPr lang="en-US" sz="3600" dirty="0">
+                <a:solidFill>
+                  <a:srgbClr val="011893"/>
+                </a:solidFill>
+                <a:cs typeface="Calibri" panose="020F0502020204030204" pitchFamily="34" charset="0"/>
+              </a:rPr>
+              <a:t> in the leaf and less photorespiration</a:t>
+            </a:r>
+            <a:endParaRPr lang="en-US" sz="3600" baseline="-25000" dirty="0">
+              <a:solidFill>
+                <a:srgbClr val="011893"/>
+              </a:solidFill>
+            </a:endParaRPr>
+          </a:p>
+        </p:txBody>
+      </p:sp>
+      <p:pic>
+        <p:nvPicPr>
+          <p:cNvPr id="3" name="Picture 2">
+            <a:extLst>
+              <a:ext uri="{FF2B5EF4-FFF2-40B4-BE49-F238E27FC236}">
+                <a16:creationId xmlns:a16="http://schemas.microsoft.com/office/drawing/2014/main" id="{91CD000D-7129-C04B-9A80-405EA9190374}"/>
+              </a:ext>
+            </a:extLst>
+          </p:cNvPr>
+          <p:cNvPicPr>
+            <a:picLocks noChangeAspect="1"/>
+          </p:cNvPicPr>
+          <p:nvPr/>
+        </p:nvPicPr>
+        <p:blipFill>
+          <a:blip r:embed="rId2" cstate="hqprint">
+            <a:extLst>
+              <a:ext uri="{28A0092B-C50C-407E-A947-70E740481C1C}">
+                <a14:useLocalDpi xmlns:a14="http://schemas.microsoft.com/office/drawing/2010/main"/>
+              </a:ext>
+            </a:extLst>
+          </a:blip>
+          <a:stretch>
+            <a:fillRect/>
+          </a:stretch>
+        </p:blipFill>
+        <p:spPr>
+          <a:xfrm>
+            <a:off x="0" y="-4207"/>
+            <a:ext cx="6858000" cy="6858000"/>
+          </a:xfrm>
+          <a:prstGeom prst="rect">
+            <a:avLst/>
+          </a:prstGeom>
+        </p:spPr>
+      </p:pic>
+    </p:spTree>
+    <p:extLst>
+      <p:ext uri="{BB962C8B-B14F-4D97-AF65-F5344CB8AC3E}">
+        <p14:creationId xmlns:p14="http://schemas.microsoft.com/office/powerpoint/2010/main" val="2821633851"/>
       </p:ext>
     </p:extLst>
   </p:cSld>
